--- a/assets/pptx/catalog-396.pptx
+++ b/assets/pptx/catalog-396.pptx
@@ -3440,7 +3440,7 @@
                 <a:ea typeface="Ebrima"/>
                 <a:cs typeface="Ebrima"/>
               </a:rPr>
-              <a:t>በጊዜ (4x)</a:t>
+              <a:t>በጊዜ 4x</a:t>
             </a:r>
           </a:p>
         </p:txBody>
@@ -3700,7 +3700,7 @@
                 <a:ea typeface="Ebrima"/>
                 <a:cs typeface="Ebrima"/>
               </a:rPr>
-              <a:t>በጊዜ (4x)</a:t>
+              <a:t>በጊዜ 4x</a:t>
             </a:r>
           </a:p>
         </p:txBody>
@@ -3839,7 +3839,7 @@
                 <a:ea typeface="Ebrima"/>
                 <a:cs typeface="Ebrima"/>
               </a:rPr>
-              <a:t>በጊዜ (4x)</a:t>
+              <a:t>በጊዜ 4x</a:t>
             </a:r>
           </a:p>
         </p:txBody>
@@ -4099,7 +4099,7 @@
                 <a:ea typeface="Ebrima"/>
                 <a:cs typeface="Ebrima"/>
               </a:rPr>
-              <a:t>በጊዜ (4x)</a:t>
+              <a:t>በጊዜ 4x</a:t>
             </a:r>
           </a:p>
         </p:txBody>
